--- a/skill/templates/blank-light.pptx
+++ b/skill/templates/blank-light.pptx
@@ -308,7 +308,7 @@
           <a:p>
             <a:fld id="{5BCAD085-E8A6-8845-BD4E-CB4CCA059FC4}" type="datetimeFigureOut">
               <a:rPr lang="en-US" smtClean="0"/>
-              <a:t>4/2/26</a:t>
+              <a:t>4/21/26</a:t>
             </a:fld>
             <a:endParaRPr lang="en-US"/>
           </a:p>
@@ -476,7 +476,7 @@
           <a:p>
             <a:fld id="{5BCAD085-E8A6-8845-BD4E-CB4CCA059FC4}" type="datetimeFigureOut">
               <a:rPr lang="en-US" smtClean="0"/>
-              <a:t>4/2/26</a:t>
+              <a:t>4/21/26</a:t>
             </a:fld>
             <a:endParaRPr lang="en-US"/>
           </a:p>
@@ -654,7 +654,7 @@
           <a:p>
             <a:fld id="{5BCAD085-E8A6-8845-BD4E-CB4CCA059FC4}" type="datetimeFigureOut">
               <a:rPr lang="en-US" smtClean="0"/>
-              <a:t>4/2/26</a:t>
+              <a:t>4/21/26</a:t>
             </a:fld>
             <a:endParaRPr lang="en-US"/>
           </a:p>
@@ -822,7 +822,7 @@
           <a:p>
             <a:fld id="{5BCAD085-E8A6-8845-BD4E-CB4CCA059FC4}" type="datetimeFigureOut">
               <a:rPr lang="en-US" smtClean="0"/>
-              <a:t>4/2/26</a:t>
+              <a:t>4/21/26</a:t>
             </a:fld>
             <a:endParaRPr lang="en-US"/>
           </a:p>
@@ -1067,7 +1067,7 @@
           <a:p>
             <a:fld id="{5BCAD085-E8A6-8845-BD4E-CB4CCA059FC4}" type="datetimeFigureOut">
               <a:rPr lang="en-US" smtClean="0"/>
-              <a:t>4/2/26</a:t>
+              <a:t>4/21/26</a:t>
             </a:fld>
             <a:endParaRPr lang="en-US"/>
           </a:p>
@@ -1352,7 +1352,7 @@
           <a:p>
             <a:fld id="{5BCAD085-E8A6-8845-BD4E-CB4CCA059FC4}" type="datetimeFigureOut">
               <a:rPr lang="en-US" smtClean="0"/>
-              <a:t>4/2/26</a:t>
+              <a:t>4/21/26</a:t>
             </a:fld>
             <a:endParaRPr lang="en-US"/>
           </a:p>
@@ -1771,7 +1771,7 @@
           <a:p>
             <a:fld id="{5BCAD085-E8A6-8845-BD4E-CB4CCA059FC4}" type="datetimeFigureOut">
               <a:rPr lang="en-US" smtClean="0"/>
-              <a:t>4/2/26</a:t>
+              <a:t>4/21/26</a:t>
             </a:fld>
             <a:endParaRPr lang="en-US"/>
           </a:p>
@@ -1861,7 +1861,7 @@
         </p:nvSpPr>
         <p:spPr>
           <a:xfrm>
-            <a:off x="457200" y="477078"/>
+            <a:off x="457200" y="337930"/>
             <a:ext cx="11022496" cy="725557"/>
           </a:xfrm>
         </p:spPr>
@@ -1899,7 +1899,7 @@
           <a:p>
             <a:fld id="{5BCAD085-E8A6-8845-BD4E-CB4CCA059FC4}" type="datetimeFigureOut">
               <a:rPr lang="en-US" smtClean="0"/>
-              <a:t>4/2/26</a:t>
+              <a:t>4/21/26</a:t>
             </a:fld>
             <a:endParaRPr lang="en-US"/>
           </a:p>
@@ -2002,7 +2002,7 @@
           <a:p>
             <a:fld id="{5BCAD085-E8A6-8845-BD4E-CB4CCA059FC4}" type="datetimeFigureOut">
               <a:rPr lang="en-US" smtClean="0"/>
-              <a:t>4/2/26</a:t>
+              <a:t>4/21/26</a:t>
             </a:fld>
             <a:endParaRPr lang="en-US"/>
           </a:p>
@@ -2277,7 +2277,7 @@
           <a:p>
             <a:fld id="{5BCAD085-E8A6-8845-BD4E-CB4CCA059FC4}" type="datetimeFigureOut">
               <a:rPr lang="en-US" smtClean="0"/>
-              <a:t>4/2/26</a:t>
+              <a:t>4/21/26</a:t>
             </a:fld>
             <a:endParaRPr lang="en-US"/>
           </a:p>
@@ -2529,7 +2529,7 @@
           <a:p>
             <a:fld id="{5BCAD085-E8A6-8845-BD4E-CB4CCA059FC4}" type="datetimeFigureOut">
               <a:rPr lang="en-US" smtClean="0"/>
-              <a:t>4/2/26</a:t>
+              <a:t>4/21/26</a:t>
             </a:fld>
             <a:endParaRPr lang="en-US"/>
           </a:p>
@@ -2740,7 +2740,7 @@
           <a:p>
             <a:fld id="{5BCAD085-E8A6-8845-BD4E-CB4CCA059FC4}" type="datetimeFigureOut">
               <a:rPr lang="en-US" smtClean="0"/>
-              <a:t>4/2/26</a:t>
+              <a:t>4/21/26</a:t>
             </a:fld>
             <a:endParaRPr lang="en-US"/>
           </a:p>
@@ -3197,10 +3197,10 @@
       </p:grpSpPr>
       <p:sp>
         <p:nvSpPr>
-          <p:cNvPr id="2" name="タイトル 1">
+          <p:cNvPr id="3" name="タイトル 2">
             <a:extLst>
               <a:ext uri="{FF2B5EF4-FFF2-40B4-BE49-F238E27FC236}">
-                <a16:creationId xmlns:a16="http://schemas.microsoft.com/office/drawing/2014/main" id="{3D4FC611-5DFB-EDDB-628E-0C14AF7CAB06}"/>
+                <a16:creationId xmlns:a16="http://schemas.microsoft.com/office/drawing/2014/main" id="{4BBC8BA1-FB06-EAC0-5EC4-521C4C27B06B}"/>
               </a:ext>
             </a:extLst>
           </p:cNvPr>
@@ -3216,7 +3216,7 @@
           <a:bodyPr/>
           <a:lstStyle/>
           <a:p>
-            <a:endParaRPr kumimoji="1" lang="ja-JP" altLang="en-US"/>
+            <a:endParaRPr lang="ja-JP" altLang="en-US"/>
           </a:p>
         </p:txBody>
       </p:sp>
